--- a/ppt_output/1.2_大模型公开数据集收集与指令数据构造.pptx
+++ b/ppt_output/1.2_大模型公开数据集收集与指令数据构造.pptx
@@ -16062,14 +16062,14 @@
                 <a:latin typeface="Arial" panose="020B0604020202020204" pitchFamily="34" charset="0"/>
                 <a:cs typeface="Arial" panose="020B0604020202020204" pitchFamily="34" charset="0"/>
               </a:rPr>
-              <a:t>JSON/CSV/JSONL</a:t>
+              <a:t>JSON/CSV</a:t>
             </a:r>
             <a:r>
               <a:rPr lang="zh-CN" altLang="en-US" dirty="0">
                 <a:latin typeface="Arial" panose="020B0604020202020204" pitchFamily="34" charset="0"/>
                 <a:cs typeface="Arial" panose="020B0604020202020204" pitchFamily="34" charset="0"/>
               </a:rPr>
-              <a:t>）、指令数据构造方法（人工编写、模板生成、模型生成）及数据清洗技术（去重、敏感词过滤、字段检查）。</a:t>
+              <a:t>）、指令数据构造（人工、模板、模型生成）及数据清洗（去重、过滤、字段检查）。重点包括多阶段数据需求差异、结构化字段设计及自动化清洗脚本开发，帮助读者掌握高质量数据集构建核心技能，为模型训练奠定数据基础</a:t>
             </a:r>
             <a:endParaRPr lang="zh-CN" altLang="en-US" dirty="0">
               <a:latin typeface="Arial" panose="020B0604020202020204" pitchFamily="34" charset="0"/>
@@ -16652,7 +16652,7 @@
               <a:rPr lang="zh-CN" sz="2000" dirty="0">
                 <a:latin typeface="Arial" panose="020B0604020202020204" pitchFamily="34" charset="0"/>
               </a:rPr>
-              <a:t>掌握数据集全流程处理方法</a:t>
+              <a:t>多阶段数据需求差异</a:t>
             </a:r>
             <a:endParaRPr lang="zh-CN" sz="2000" dirty="0">
               <a:latin typeface="Arial" panose="020B0604020202020204" pitchFamily="34" charset="0"/>
@@ -16693,7 +16693,7 @@
                 <a:latin typeface="Arial" panose="020B0604020202020204" pitchFamily="34" charset="0"/>
                 <a:sym typeface="+mn-ea"/>
               </a:rPr>
-              <a:t>多阶段数据需求差异分析</a:t>
+              <a:t>不同训练阶段数据特点的把握</a:t>
             </a:r>
             <a:endParaRPr lang="zh-CN" sz="2000" dirty="0">
               <a:latin typeface="Arial" panose="020B0604020202020204" pitchFamily="34" charset="0"/>
@@ -16734,7 +16734,7 @@
               <a:rPr lang="zh-CN" sz="2000" dirty="0">
                 <a:latin typeface="Arial" panose="020B0604020202020204" pitchFamily="34" charset="0"/>
               </a:rPr>
-              <a:t>理解多种存储格式与组织格式</a:t>
+              <a:t>结构化字段设计</a:t>
             </a:r>
             <a:endParaRPr lang="zh-CN" sz="2000" dirty="0">
               <a:latin typeface="Arial" panose="020B0604020202020204" pitchFamily="34" charset="0"/>
@@ -16774,7 +16774,7 @@
               <a:rPr lang="zh-CN" sz="2000" dirty="0">
                 <a:latin typeface="Arial" panose="020B0604020202020204" pitchFamily="34" charset="0"/>
               </a:rPr>
-              <a:t>学会构造高质量指令数据</a:t>
+              <a:t>自动化清洗脚本开发</a:t>
             </a:r>
             <a:endParaRPr lang="zh-CN" sz="2000" dirty="0">
               <a:latin typeface="Arial" panose="020B0604020202020204" pitchFamily="34" charset="0"/>
@@ -16815,7 +16815,7 @@
                 <a:latin typeface="Arial" panose="020B0604020202020204" pitchFamily="34" charset="0"/>
                 <a:sym typeface="+mn-ea"/>
               </a:rPr>
-              <a:t>结构化字段设计规范</a:t>
+              <a:t>高质量指令数据的构造方法</a:t>
             </a:r>
             <a:endParaRPr lang="zh-CN" sz="2000" dirty="0">
               <a:latin typeface="Arial" panose="020B0604020202020204" pitchFamily="34" charset="0"/>
@@ -16857,7 +16857,7 @@
                 <a:latin typeface="Arial" panose="020B0604020202020204" pitchFamily="34" charset="0"/>
                 <a:sym typeface="+mn-ea"/>
               </a:rPr>
-              <a:t>自动化清洗脚本开发</a:t>
+              <a:t>大规模数据的清洗效率与质量</a:t>
             </a:r>
             <a:endParaRPr lang="zh-CN" sz="2000" dirty="0">
               <a:latin typeface="Arial" panose="020B0604020202020204" pitchFamily="34" charset="0"/>
@@ -18628,7 +18628,7 @@
                 <a:cs typeface="微软雅黑" panose="020B0503020204020204" pitchFamily="34" charset="-122"/>
                 <a:sym typeface="+mn-ea"/>
               </a:rPr>
-              <a:t>从</a:t>
+              <a:t>数据获取：提取</a:t>
             </a:r>
             <a:r>
               <a:rPr lang="en-US" altLang="zh-CN" sz="2000" dirty="0">
@@ -18646,7 +18646,7 @@
                 <a:cs typeface="微软雅黑" panose="020B0503020204020204" pitchFamily="34" charset="-122"/>
                 <a:sym typeface="+mn-ea"/>
               </a:rPr>
-              <a:t>提取</a:t>
+              <a:t>中</a:t>
             </a:r>
             <a:r>
               <a:rPr lang="en-US" altLang="zh-CN" sz="2000" dirty="0">
@@ -18682,7 +18682,25 @@
                 <a:cs typeface="微软雅黑" panose="020B0503020204020204" pitchFamily="34" charset="-122"/>
                 <a:sym typeface="+mn-ea"/>
               </a:rPr>
-              <a:t>条，用</a:t>
+              <a:t>条保存为</a:t>
+            </a:r>
+            <a:r>
+              <a:rPr lang="en-US" altLang="zh-CN" sz="2000" dirty="0">
+                <a:latin typeface="微软雅黑" panose="020B0503020204020204" pitchFamily="34" charset="-122"/>
+                <a:ea typeface="微软雅黑" panose="020B0503020204020204" pitchFamily="34" charset="-122"/>
+                <a:cs typeface="微软雅黑" panose="020B0503020204020204" pitchFamily="34" charset="-122"/>
+                <a:sym typeface="+mn-ea"/>
+              </a:rPr>
+              <a:t>ner_100.json</a:t>
+            </a:r>
+            <a:r>
+              <a:rPr lang="zh-CN" altLang="en-US" sz="2000" dirty="0">
+                <a:latin typeface="微软雅黑" panose="020B0503020204020204" pitchFamily="34" charset="-122"/>
+                <a:ea typeface="微软雅黑" panose="020B0503020204020204" pitchFamily="34" charset="-122"/>
+                <a:cs typeface="微软雅黑" panose="020B0503020204020204" pitchFamily="34" charset="-122"/>
+                <a:sym typeface="+mn-ea"/>
+              </a:rPr>
+              <a:t>，用</a:t>
             </a:r>
             <a:r>
               <a:rPr lang="en-US" altLang="zh-CN" sz="2000" dirty="0">
@@ -18718,7 +18736,79 @@
                 <a:cs typeface="微软雅黑" panose="020B0503020204020204" pitchFamily="34" charset="-122"/>
                 <a:sym typeface="+mn-ea"/>
               </a:rPr>
-              <a:t>组问答。合并去重，过滤异常条目，转为</a:t>
+              <a:t>组问答保存为</a:t>
+            </a:r>
+            <a:r>
+              <a:rPr lang="en-US" altLang="zh-CN" sz="2000" dirty="0">
+                <a:latin typeface="微软雅黑" panose="020B0503020204020204" pitchFamily="34" charset="-122"/>
+                <a:ea typeface="微软雅黑" panose="020B0503020204020204" pitchFamily="34" charset="-122"/>
+                <a:cs typeface="微软雅黑" panose="020B0503020204020204" pitchFamily="34" charset="-122"/>
+                <a:sym typeface="+mn-ea"/>
+              </a:rPr>
+              <a:t>qwen_data.json</a:t>
+            </a:r>
+            <a:r>
+              <a:rPr lang="zh-CN" altLang="en-US" sz="2000" dirty="0">
+                <a:latin typeface="微软雅黑" panose="020B0503020204020204" pitchFamily="34" charset="-122"/>
+                <a:ea typeface="微软雅黑" panose="020B0503020204020204" pitchFamily="34" charset="-122"/>
+                <a:cs typeface="微软雅黑" panose="020B0503020204020204" pitchFamily="34" charset="-122"/>
+                <a:sym typeface="+mn-ea"/>
+              </a:rPr>
+              <a:t>。数据清洗：合并去重，过滤</a:t>
+            </a:r>
+            <a:r>
+              <a:rPr lang="en-US" altLang="zh-CN" sz="2000" dirty="0">
+                <a:latin typeface="微软雅黑" panose="020B0503020204020204" pitchFamily="34" charset="-122"/>
+                <a:ea typeface="微软雅黑" panose="020B0503020204020204" pitchFamily="34" charset="-122"/>
+                <a:cs typeface="微软雅黑" panose="020B0503020204020204" pitchFamily="34" charset="-122"/>
+                <a:sym typeface="+mn-ea"/>
+              </a:rPr>
+              <a:t>output</a:t>
+            </a:r>
+            <a:r>
+              <a:rPr lang="zh-CN" altLang="en-US" sz="2000" dirty="0">
+                <a:latin typeface="微软雅黑" panose="020B0503020204020204" pitchFamily="34" charset="-122"/>
+                <a:ea typeface="微软雅黑" panose="020B0503020204020204" pitchFamily="34" charset="-122"/>
+                <a:cs typeface="微软雅黑" panose="020B0503020204020204" pitchFamily="34" charset="-122"/>
+                <a:sym typeface="+mn-ea"/>
+              </a:rPr>
+              <a:t>长度</a:t>
+            </a:r>
+            <a:r>
+              <a:rPr lang="en-US" altLang="zh-CN" sz="2000" dirty="0">
+                <a:latin typeface="微软雅黑" panose="020B0503020204020204" pitchFamily="34" charset="-122"/>
+                <a:ea typeface="微软雅黑" panose="020B0503020204020204" pitchFamily="34" charset="-122"/>
+                <a:cs typeface="微软雅黑" panose="020B0503020204020204" pitchFamily="34" charset="-122"/>
+                <a:sym typeface="+mn-ea"/>
+              </a:rPr>
+              <a:t>&lt;10</a:t>
+            </a:r>
+            <a:r>
+              <a:rPr lang="zh-CN" altLang="en-US" sz="2000" dirty="0">
+                <a:latin typeface="微软雅黑" panose="020B0503020204020204" pitchFamily="34" charset="-122"/>
+                <a:ea typeface="微软雅黑" panose="020B0503020204020204" pitchFamily="34" charset="-122"/>
+                <a:cs typeface="微软雅黑" panose="020B0503020204020204" pitchFamily="34" charset="-122"/>
+                <a:sym typeface="+mn-ea"/>
+              </a:rPr>
+              <a:t>或</a:t>
+            </a:r>
+            <a:r>
+              <a:rPr lang="en-US" altLang="zh-CN" sz="2000" dirty="0">
+                <a:latin typeface="微软雅黑" panose="020B0503020204020204" pitchFamily="34" charset="-122"/>
+                <a:ea typeface="微软雅黑" panose="020B0503020204020204" pitchFamily="34" charset="-122"/>
+                <a:cs typeface="微软雅黑" panose="020B0503020204020204" pitchFamily="34" charset="-122"/>
+                <a:sym typeface="+mn-ea"/>
+              </a:rPr>
+              <a:t>&gt;500</a:t>
+            </a:r>
+            <a:r>
+              <a:rPr lang="zh-CN" altLang="en-US" sz="2000" dirty="0">
+                <a:latin typeface="微软雅黑" panose="020B0503020204020204" pitchFamily="34" charset="-122"/>
+                <a:ea typeface="微软雅黑" panose="020B0503020204020204" pitchFamily="34" charset="-122"/>
+                <a:cs typeface="微软雅黑" panose="020B0503020204020204" pitchFamily="34" charset="-122"/>
+                <a:sym typeface="+mn-ea"/>
+              </a:rPr>
+              <a:t>的条目，统一字段命名。格式转换：转为</a:t>
             </a:r>
             <a:r>
               <a:rPr lang="en-US" altLang="zh-CN" sz="2000" dirty="0">
@@ -18736,9 +18826,18 @@
                 <a:cs typeface="微软雅黑" panose="020B0503020204020204" pitchFamily="34" charset="-122"/>
                 <a:sym typeface="+mn-ea"/>
               </a:rPr>
-              <a:t>格式。</a:t>
+              <a:t>保存为</a:t>
             </a:r>
-            <a:endParaRPr lang="zh-CN" altLang="en-US" sz="2000" dirty="0">
+            <a:r>
+              <a:rPr lang="en-US" altLang="zh-CN" sz="2000" dirty="0">
+                <a:latin typeface="微软雅黑" panose="020B0503020204020204" pitchFamily="34" charset="-122"/>
+                <a:ea typeface="微软雅黑" panose="020B0503020204020204" pitchFamily="34" charset="-122"/>
+                <a:cs typeface="微软雅黑" panose="020B0503020204020204" pitchFamily="34" charset="-122"/>
+                <a:sym typeface="+mn-ea"/>
+              </a:rPr>
+              <a:t>final_dataset.jsonl</a:t>
+            </a:r>
+            <a:endParaRPr lang="en-US" altLang="zh-CN" sz="2000" dirty="0">
               <a:latin typeface="微软雅黑" panose="020B0503020204020204" pitchFamily="34" charset="-122"/>
               <a:ea typeface="微软雅黑" panose="020B0503020204020204" pitchFamily="34" charset="-122"/>
               <a:cs typeface="微软雅黑" panose="020B0503020204020204" pitchFamily="34" charset="-122"/>
@@ -18833,9 +18932,81 @@
                 <a:cs typeface="微软雅黑" panose="020B0503020204020204" pitchFamily="34" charset="-122"/>
                 <a:sym typeface="+mn-ea"/>
               </a:rPr>
-              <a:t>通过多格式数据提取、合并去重、长度过滤与字段规范化，完成数据集质量控制与格式统一，实现从原始数据到训练可用数据集的完整转换流程。</a:t>
+              <a:t>技能实践涵盖数据获取、整合、清洗、格式转换全流程。首先从</a:t>
             </a:r>
-            <a:endParaRPr lang="zh-CN" sz="2000" dirty="0">
+            <a:r>
+              <a:rPr lang="en-US" altLang="zh-CN" sz="2000" dirty="0">
+                <a:latin typeface="微软雅黑" panose="020B0503020204020204" pitchFamily="34" charset="-122"/>
+                <a:ea typeface="微软雅黑" panose="020B0503020204020204" pitchFamily="34" charset="-122"/>
+                <a:cs typeface="微软雅黑" panose="020B0503020204020204" pitchFamily="34" charset="-122"/>
+                <a:sym typeface="+mn-ea"/>
+              </a:rPr>
+              <a:t> firefly.jsonl </a:t>
+            </a:r>
+            <a:r>
+              <a:rPr lang="zh-CN" altLang="en-US" sz="2000" dirty="0">
+                <a:latin typeface="微软雅黑" panose="020B0503020204020204" pitchFamily="34" charset="-122"/>
+                <a:ea typeface="微软雅黑" panose="020B0503020204020204" pitchFamily="34" charset="-122"/>
+                <a:cs typeface="微软雅黑" panose="020B0503020204020204" pitchFamily="34" charset="-122"/>
+                <a:sym typeface="+mn-ea"/>
+              </a:rPr>
+              <a:t>提取</a:t>
+            </a:r>
+            <a:r>
+              <a:rPr lang="en-US" altLang="zh-CN" sz="2000" dirty="0">
+                <a:latin typeface="微软雅黑" panose="020B0503020204020204" pitchFamily="34" charset="-122"/>
+                <a:ea typeface="微软雅黑" panose="020B0503020204020204" pitchFamily="34" charset="-122"/>
+                <a:cs typeface="微软雅黑" panose="020B0503020204020204" pitchFamily="34" charset="-122"/>
+                <a:sym typeface="+mn-ea"/>
+              </a:rPr>
+              <a:t> NER </a:t>
+            </a:r>
+            <a:r>
+              <a:rPr lang="zh-CN" altLang="en-US" sz="2000" dirty="0">
+                <a:latin typeface="微软雅黑" panose="020B0503020204020204" pitchFamily="34" charset="-122"/>
+                <a:ea typeface="微软雅黑" panose="020B0503020204020204" pitchFamily="34" charset="-122"/>
+                <a:cs typeface="微软雅黑" panose="020B0503020204020204" pitchFamily="34" charset="-122"/>
+                <a:sym typeface="+mn-ea"/>
+              </a:rPr>
+              <a:t>数据，用</a:t>
+            </a:r>
+            <a:r>
+              <a:rPr lang="en-US" altLang="zh-CN" sz="2000" dirty="0">
+                <a:latin typeface="微软雅黑" panose="020B0503020204020204" pitchFamily="34" charset="-122"/>
+                <a:ea typeface="微软雅黑" panose="020B0503020204020204" pitchFamily="34" charset="-122"/>
+                <a:cs typeface="微软雅黑" panose="020B0503020204020204" pitchFamily="34" charset="-122"/>
+                <a:sym typeface="+mn-ea"/>
+              </a:rPr>
+              <a:t> Qwen </a:t>
+            </a:r>
+            <a:r>
+              <a:rPr lang="zh-CN" altLang="en-US" sz="2000" dirty="0">
+                <a:latin typeface="微软雅黑" panose="020B0503020204020204" pitchFamily="34" charset="-122"/>
+                <a:ea typeface="微软雅黑" panose="020B0503020204020204" pitchFamily="34" charset="-122"/>
+                <a:cs typeface="微软雅黑" panose="020B0503020204020204" pitchFamily="34" charset="-122"/>
+                <a:sym typeface="+mn-ea"/>
+              </a:rPr>
+              <a:t>生成问答对；然后合并去重，过滤长度异常数据，检查字段命名；最后转换为</a:t>
+            </a:r>
+            <a:r>
+              <a:rPr lang="en-US" altLang="zh-CN" sz="2000" dirty="0">
+                <a:latin typeface="微软雅黑" panose="020B0503020204020204" pitchFamily="34" charset="-122"/>
+                <a:ea typeface="微软雅黑" panose="020B0503020204020204" pitchFamily="34" charset="-122"/>
+                <a:cs typeface="微软雅黑" panose="020B0503020204020204" pitchFamily="34" charset="-122"/>
+                <a:sym typeface="+mn-ea"/>
+              </a:rPr>
+              <a:t> JSONL </a:t>
+            </a:r>
+            <a:r>
+              <a:rPr lang="zh-CN" altLang="en-US" sz="2000" dirty="0">
+                <a:latin typeface="微软雅黑" panose="020B0503020204020204" pitchFamily="34" charset="-122"/>
+                <a:ea typeface="微软雅黑" panose="020B0503020204020204" pitchFamily="34" charset="-122"/>
+                <a:cs typeface="微软雅黑" panose="020B0503020204020204" pitchFamily="34" charset="-122"/>
+                <a:sym typeface="+mn-ea"/>
+              </a:rPr>
+              <a:t>格式保存，完成数据集构建。</a:t>
+            </a:r>
+            <a:endParaRPr lang="zh-CN" altLang="en-US" sz="2000" dirty="0">
               <a:latin typeface="微软雅黑" panose="020B0503020204020204" pitchFamily="34" charset="-122"/>
               <a:ea typeface="微软雅黑" panose="020B0503020204020204" pitchFamily="34" charset="-122"/>
               <a:cs typeface="微软雅黑" panose="020B0503020204020204" pitchFamily="34" charset="-122"/>
@@ -20018,7 +20189,7 @@
                 <a:cs typeface="微软雅黑" panose="020B0503020204020204" pitchFamily="34" charset="-122"/>
                 <a:sym typeface="+mn-ea"/>
               </a:rPr>
-              <a:t>以《山海经》白泽为引，阐述传统机器翻译的局限性，引出</a:t>
+              <a:t>以《山海经》神兽白泽为引，阐述让机器理解中文语义的挑战：从传统机器翻译的词不达意，到</a:t>
             </a:r>
             <a:r>
               <a:rPr lang="en-US" altLang="zh-CN" dirty="0">
@@ -20036,7 +20207,7 @@
                 <a:cs typeface="微软雅黑" panose="020B0503020204020204" pitchFamily="34" charset="-122"/>
                 <a:sym typeface="+mn-ea"/>
               </a:rPr>
-              <a:t>架构的突破。注意力机制使模型通览全文、把握上下文关联，通过中文分词与词嵌入技术将汉字映射至高维向量空间，实现语义理解。指令数据的构造赋予模型认知能力，使其能理解指令、举一反三。</a:t>
+              <a:t>通过注意力机制实现上下文关联；再到大模型依赖高质量中文数据集进行分词与向量化，将汉字映射至高维向量空间，实现语义理解；最终通过指令数据对齐训练，赋予模型听懂指令、举一反三的能力。</a:t>
             </a:r>
             <a:endParaRPr lang="zh-CN" altLang="en-US" dirty="0">
               <a:latin typeface="微软雅黑" panose="020B0503020204020204" pitchFamily="34" charset="-122"/>
@@ -20108,7 +20279,7 @@
                 <a:ea typeface="微软雅黑" panose="020B0503020204020204" pitchFamily="34" charset="-122"/>
                 <a:cs typeface="微软雅黑" panose="020B0503020204020204" pitchFamily="34" charset="-122"/>
               </a:rPr>
-              <a:t>机器如何真正理解复杂概念？</a:t>
+              <a:t>计算机如何将无意义字符编码转化为可理解的语义？</a:t>
             </a:r>
             <a:r>
               <a:rPr lang="en-US" altLang="zh-CN" sz="2000" dirty="0">
@@ -20125,7 +20296,7 @@
                 <a:ea typeface="微软雅黑" panose="020B0503020204020204" pitchFamily="34" charset="-122"/>
                 <a:cs typeface="微软雅黑" panose="020B0503020204020204" pitchFamily="34" charset="-122"/>
               </a:rPr>
-              <a:t>如何超越逐字翻译的局限？</a:t>
+              <a:t>如何通过注意力机制实现跨句关联？</a:t>
             </a:r>
             <a:r>
               <a:rPr lang="en-US" altLang="zh-CN" sz="2000" dirty="0">
@@ -20142,7 +20313,7 @@
                 <a:ea typeface="微软雅黑" panose="020B0503020204020204" pitchFamily="34" charset="-122"/>
                 <a:cs typeface="微软雅黑" panose="020B0503020204020204" pitchFamily="34" charset="-122"/>
               </a:rPr>
-              <a:t>中文分词与向量化如何实现语义关联？</a:t>
+              <a:t>中文大模型的认知深度取决于哪些关键因素？</a:t>
             </a:r>
             <a:endParaRPr lang="zh-CN" altLang="en-US" sz="2000" dirty="0">
               <a:latin typeface="微软雅黑" panose="020B0503020204020204" pitchFamily="34" charset="-122"/>
@@ -22609,7 +22780,71 @@
                 <a:ea typeface="微软雅黑" panose="020B0503020204020204" pitchFamily="34" charset="-122"/>
                 <a:cs typeface="微软雅黑" panose="020B0503020204020204" pitchFamily="34" charset="-122"/>
               </a:rPr>
-              <a:t>能够访问常见公开数据集资源，理解多种数据集存储格式，掌握</a:t>
+              <a:t>可访问</a:t>
+            </a:r>
+            <a:r>
+              <a:rPr lang="en-US" altLang="zh-CN" dirty="0" smtClean="0">
+                <a:latin typeface="微软雅黑" panose="020B0503020204020204" pitchFamily="34" charset="-122"/>
+                <a:ea typeface="微软雅黑" panose="020B0503020204020204" pitchFamily="34" charset="-122"/>
+                <a:cs typeface="微软雅黑" panose="020B0503020204020204" pitchFamily="34" charset="-122"/>
+              </a:rPr>
+              <a:t>HuggingFace</a:t>
+            </a:r>
+            <a:r>
+              <a:rPr lang="zh-CN" altLang="en-US" dirty="0" smtClean="0">
+                <a:latin typeface="微软雅黑" panose="020B0503020204020204" pitchFamily="34" charset="-122"/>
+                <a:ea typeface="微软雅黑" panose="020B0503020204020204" pitchFamily="34" charset="-122"/>
+                <a:cs typeface="微软雅黑" panose="020B0503020204020204" pitchFamily="34" charset="-122"/>
+              </a:rPr>
+              <a:t>、</a:t>
+            </a:r>
+            <a:r>
+              <a:rPr lang="en-US" altLang="zh-CN" dirty="0" smtClean="0">
+                <a:latin typeface="微软雅黑" panose="020B0503020204020204" pitchFamily="34" charset="-122"/>
+                <a:ea typeface="微软雅黑" panose="020B0503020204020204" pitchFamily="34" charset="-122"/>
+                <a:cs typeface="微软雅黑" panose="020B0503020204020204" pitchFamily="34" charset="-122"/>
+              </a:rPr>
+              <a:t>ModelScope</a:t>
+            </a:r>
+            <a:r>
+              <a:rPr lang="zh-CN" altLang="en-US" dirty="0" smtClean="0">
+                <a:latin typeface="微软雅黑" panose="020B0503020204020204" pitchFamily="34" charset="-122"/>
+                <a:ea typeface="微软雅黑" panose="020B0503020204020204" pitchFamily="34" charset="-122"/>
+                <a:cs typeface="微软雅黑" panose="020B0503020204020204" pitchFamily="34" charset="-122"/>
+              </a:rPr>
+              <a:t>等公开数据集；理解</a:t>
+            </a:r>
+            <a:r>
+              <a:rPr lang="en-US" altLang="zh-CN" dirty="0" smtClean="0">
+                <a:latin typeface="微软雅黑" panose="020B0503020204020204" pitchFamily="34" charset="-122"/>
+                <a:ea typeface="微软雅黑" panose="020B0503020204020204" pitchFamily="34" charset="-122"/>
+                <a:cs typeface="微软雅黑" panose="020B0503020204020204" pitchFamily="34" charset="-122"/>
+              </a:rPr>
+              <a:t>JSON</a:t>
+            </a:r>
+            <a:r>
+              <a:rPr lang="zh-CN" altLang="en-US" dirty="0" smtClean="0">
+                <a:latin typeface="微软雅黑" panose="020B0503020204020204" pitchFamily="34" charset="-122"/>
+                <a:ea typeface="微软雅黑" panose="020B0503020204020204" pitchFamily="34" charset="-122"/>
+                <a:cs typeface="微软雅黑" panose="020B0503020204020204" pitchFamily="34" charset="-122"/>
+              </a:rPr>
+              <a:t>、</a:t>
+            </a:r>
+            <a:r>
+              <a:rPr lang="en-US" altLang="zh-CN" dirty="0" smtClean="0">
+                <a:latin typeface="微软雅黑" panose="020B0503020204020204" pitchFamily="34" charset="-122"/>
+                <a:ea typeface="微软雅黑" panose="020B0503020204020204" pitchFamily="34" charset="-122"/>
+                <a:cs typeface="微软雅黑" panose="020B0503020204020204" pitchFamily="34" charset="-122"/>
+              </a:rPr>
+              <a:t>CSV</a:t>
+            </a:r>
+            <a:r>
+              <a:rPr lang="zh-CN" altLang="en-US" dirty="0" smtClean="0">
+                <a:latin typeface="微软雅黑" panose="020B0503020204020204" pitchFamily="34" charset="-122"/>
+                <a:ea typeface="微软雅黑" panose="020B0503020204020204" pitchFamily="34" charset="-122"/>
+                <a:cs typeface="微软雅黑" panose="020B0503020204020204" pitchFamily="34" charset="-122"/>
+              </a:rPr>
+              <a:t>等存储格式；掌握</a:t>
             </a:r>
             <a:r>
               <a:rPr lang="en-US" altLang="zh-CN" dirty="0" smtClean="0">
@@ -22625,7 +22860,7 @@
                 <a:ea typeface="微软雅黑" panose="020B0503020204020204" pitchFamily="34" charset="-122"/>
                 <a:cs typeface="微软雅黑" panose="020B0503020204020204" pitchFamily="34" charset="-122"/>
               </a:rPr>
-              <a:t>、</a:t>
+              <a:t>等指令格式；编写脚本构造结构化指令数据；使用</a:t>
             </a:r>
             <a:r>
               <a:rPr lang="en-US" altLang="zh-CN" dirty="0" smtClean="0">
@@ -22633,7 +22868,7 @@
                 <a:ea typeface="微软雅黑" panose="020B0503020204020204" pitchFamily="34" charset="-122"/>
                 <a:cs typeface="微软雅黑" panose="020B0503020204020204" pitchFamily="34" charset="-122"/>
               </a:rPr>
-              <a:t>ShareGPT</a:t>
+              <a:t>Pandas</a:t>
             </a:r>
             <a:r>
               <a:rPr lang="zh-CN" altLang="en-US" dirty="0" smtClean="0">
@@ -22641,7 +22876,7 @@
                 <a:ea typeface="微软雅黑" panose="020B0503020204020204" pitchFamily="34" charset="-122"/>
                 <a:cs typeface="微软雅黑" panose="020B0503020204020204" pitchFamily="34" charset="-122"/>
               </a:rPr>
-              <a:t>等主流数据集组织格式，能够编写脚本或使用工具构造结构化指令数据。</a:t>
+              <a:t>、正则进行数据清洗与质量检查</a:t>
             </a:r>
             <a:endParaRPr lang="zh-CN" altLang="en-US" dirty="0" smtClean="0">
               <a:latin typeface="微软雅黑" panose="020B0503020204020204" pitchFamily="34" charset="-122"/>
@@ -22954,27 +23189,9 @@
                 <a:cs typeface="微软雅黑" panose="020B0503020204020204" pitchFamily="34" charset="-122"/>
                 <a:sym typeface="+mn-ea"/>
               </a:rPr>
-              <a:t>访问</a:t>
+              <a:t>能够访问常见公开数据集资源</a:t>
             </a:r>
-            <a:r>
-              <a:rPr lang="en-US" altLang="zh-CN" dirty="0">
-                <a:latin typeface="微软雅黑" panose="020B0503020204020204" pitchFamily="34" charset="-122"/>
-                <a:ea typeface="微软雅黑" panose="020B0503020204020204" pitchFamily="34" charset="-122"/>
-                <a:cs typeface="微软雅黑" panose="020B0503020204020204" pitchFamily="34" charset="-122"/>
-                <a:sym typeface="+mn-ea"/>
-              </a:rPr>
-              <a:t>HuggingFace</a:t>
-            </a:r>
-            <a:r>
-              <a:rPr lang="zh-CN" altLang="en-US" dirty="0">
-                <a:latin typeface="微软雅黑" panose="020B0503020204020204" pitchFamily="34" charset="-122"/>
-                <a:ea typeface="微软雅黑" panose="020B0503020204020204" pitchFamily="34" charset="-122"/>
-                <a:cs typeface="微软雅黑" panose="020B0503020204020204" pitchFamily="34" charset="-122"/>
-                <a:sym typeface="+mn-ea"/>
-              </a:rPr>
-              <a:t>等数据集平台</a:t>
-            </a:r>
-            <a:endParaRPr lang="zh-CN" altLang="en-US" dirty="0">
+            <a:endParaRPr lang="zh-CN" dirty="0">
               <a:latin typeface="微软雅黑" panose="020B0503020204020204" pitchFamily="34" charset="-122"/>
               <a:ea typeface="微软雅黑" panose="020B0503020204020204" pitchFamily="34" charset="-122"/>
               <a:cs typeface="微软雅黑" panose="020B0503020204020204" pitchFamily="34" charset="-122"/>
@@ -23018,63 +23235,9 @@
                 <a:cs typeface="微软雅黑" panose="020B0503020204020204" pitchFamily="34" charset="-122"/>
                 <a:sym typeface="+mn-ea"/>
               </a:rPr>
-              <a:t>使用</a:t>
+              <a:t>理解并使用多种数据集存储格式</a:t>
             </a:r>
-            <a:r>
-              <a:rPr lang="en-US" altLang="zh-CN" dirty="0">
-                <a:latin typeface="微软雅黑" panose="020B0503020204020204" pitchFamily="34" charset="-122"/>
-                <a:ea typeface="微软雅黑" panose="020B0503020204020204" pitchFamily="34" charset="-122"/>
-                <a:cs typeface="微软雅黑" panose="020B0503020204020204" pitchFamily="34" charset="-122"/>
-                <a:sym typeface="+mn-ea"/>
-              </a:rPr>
-              <a:t>TXT</a:t>
-            </a:r>
-            <a:r>
-              <a:rPr lang="zh-CN" altLang="en-US" dirty="0">
-                <a:latin typeface="微软雅黑" panose="020B0503020204020204" pitchFamily="34" charset="-122"/>
-                <a:ea typeface="微软雅黑" panose="020B0503020204020204" pitchFamily="34" charset="-122"/>
-                <a:cs typeface="微软雅黑" panose="020B0503020204020204" pitchFamily="34" charset="-122"/>
-                <a:sym typeface="+mn-ea"/>
-              </a:rPr>
-              <a:t>、</a:t>
-            </a:r>
-            <a:r>
-              <a:rPr lang="en-US" altLang="zh-CN" dirty="0">
-                <a:latin typeface="微软雅黑" panose="020B0503020204020204" pitchFamily="34" charset="-122"/>
-                <a:ea typeface="微软雅黑" panose="020B0503020204020204" pitchFamily="34" charset="-122"/>
-                <a:cs typeface="微软雅黑" panose="020B0503020204020204" pitchFamily="34" charset="-122"/>
-                <a:sym typeface="+mn-ea"/>
-              </a:rPr>
-              <a:t>CSV</a:t>
-            </a:r>
-            <a:r>
-              <a:rPr lang="zh-CN" altLang="en-US" dirty="0">
-                <a:latin typeface="微软雅黑" panose="020B0503020204020204" pitchFamily="34" charset="-122"/>
-                <a:ea typeface="微软雅黑" panose="020B0503020204020204" pitchFamily="34" charset="-122"/>
-                <a:cs typeface="微软雅黑" panose="020B0503020204020204" pitchFamily="34" charset="-122"/>
-                <a:sym typeface="+mn-ea"/>
-              </a:rPr>
-              <a:t>、</a:t>
-            </a:r>
-            <a:r>
-              <a:rPr lang="en-US" altLang="zh-CN" dirty="0">
-                <a:latin typeface="微软雅黑" panose="020B0503020204020204" pitchFamily="34" charset="-122"/>
-                <a:ea typeface="微软雅黑" panose="020B0503020204020204" pitchFamily="34" charset="-122"/>
-                <a:cs typeface="微软雅黑" panose="020B0503020204020204" pitchFamily="34" charset="-122"/>
-                <a:sym typeface="+mn-ea"/>
-              </a:rPr>
-              <a:t>JSON</a:t>
-            </a:r>
-            <a:r>
-              <a:rPr lang="zh-CN" altLang="en-US" dirty="0">
-                <a:latin typeface="微软雅黑" panose="020B0503020204020204" pitchFamily="34" charset="-122"/>
-                <a:ea typeface="微软雅黑" panose="020B0503020204020204" pitchFamily="34" charset="-122"/>
-                <a:cs typeface="微软雅黑" panose="020B0503020204020204" pitchFamily="34" charset="-122"/>
-                <a:sym typeface="+mn-ea"/>
-              </a:rPr>
-              <a:t>等数据集存储格式</a:t>
-            </a:r>
-            <a:endParaRPr lang="zh-CN" altLang="en-US" dirty="0">
+            <a:endParaRPr lang="zh-CN" dirty="0">
               <a:latin typeface="微软雅黑" panose="020B0503020204020204" pitchFamily="34" charset="-122"/>
               <a:ea typeface="微软雅黑" panose="020B0503020204020204" pitchFamily="34" charset="-122"/>
               <a:cs typeface="微软雅黑" panose="020B0503020204020204" pitchFamily="34" charset="-122"/>
@@ -23154,7 +23317,7 @@
                 <a:cs typeface="微软雅黑" panose="020B0503020204020204" pitchFamily="34" charset="-122"/>
                 <a:sym typeface="+mn-ea"/>
               </a:rPr>
-              <a:t>等数据集组织格式</a:t>
+              <a:t>等主流数据集组织格式</a:t>
             </a:r>
             <a:endParaRPr lang="zh-CN" altLang="en-US" dirty="0">
               <a:latin typeface="微软雅黑" panose="020B0503020204020204" pitchFamily="34" charset="-122"/>
@@ -23200,7 +23363,7 @@
                 <a:cs typeface="微软雅黑" panose="020B0503020204020204" pitchFamily="34" charset="-122"/>
                 <a:sym typeface="+mn-ea"/>
               </a:rPr>
-              <a:t>编写脚本或使用工具构造结构化指令数据</a:t>
+              <a:t>能够编写脚本或使用工具构造结构化指令数据</a:t>
             </a:r>
             <a:endParaRPr lang="zh-CN" dirty="0">
               <a:latin typeface="微软雅黑" panose="020B0503020204020204" pitchFamily="34" charset="-122"/>
@@ -23246,7 +23409,7 @@
                 <a:cs typeface="微软雅黑" panose="020B0503020204020204" pitchFamily="34" charset="-122"/>
                 <a:sym typeface="+mn-ea"/>
               </a:rPr>
-              <a:t>完成数据集初步质量检查与格式标准化</a:t>
+              <a:t>掌握数据清洗的方法与常用工具</a:t>
             </a:r>
             <a:endParaRPr lang="zh-CN" dirty="0">
               <a:latin typeface="微软雅黑" panose="020B0503020204020204" pitchFamily="34" charset="-122"/>
@@ -26960,7 +27123,7 @@
                 <a:cs typeface="Times New Roman" panose="02020603050405020304" charset="0"/>
                 <a:sym typeface="+mn-ea"/>
               </a:rPr>
-              <a:t>识别并获取适用于不同训练阶段的大规模语言模型数据集</a:t>
+              <a:t>能够识别并获取适用于不同训练阶段的大规模语言模型数据集</a:t>
             </a:r>
             <a:endParaRPr lang="zh-CN" dirty="0" smtClean="0">
               <a:latin typeface="Arial" panose="020B0604020202020204" pitchFamily="34" charset="0"/>
@@ -27004,7 +27167,7 @@
                 <a:cs typeface="Times New Roman" panose="02020603050405020304" charset="0"/>
                 <a:sym typeface="+mn-ea"/>
               </a:rPr>
-              <a:t>根据实际需求构造高质量的指令数据</a:t>
+              <a:t>能够根据实际需求构造高质量的指令数据</a:t>
             </a:r>
             <a:endParaRPr lang="zh-CN" dirty="0" smtClean="0">
               <a:latin typeface="Arial" panose="020B0604020202020204" pitchFamily="34" charset="0"/>
@@ -27092,7 +27255,7 @@
                 <a:cs typeface="Times New Roman" panose="02020603050405020304" charset="0"/>
                 <a:sym typeface="+mn-ea"/>
               </a:rPr>
-              <a:t>重点：指令数据构造与数据清洗技术</a:t>
+              <a:t>重点：数据集识别、存储格式、指令数据构造、清洗检查全流程</a:t>
             </a:r>
             <a:endParaRPr lang="zh-CN" altLang="en-US" dirty="0" smtClean="0">
               <a:latin typeface="Arial" panose="020B0604020202020204" pitchFamily="34" charset="0"/>
@@ -27136,7 +27299,7 @@
                 <a:cs typeface="Times New Roman" panose="02020603050405020304" charset="0"/>
                 <a:sym typeface="+mn-ea"/>
               </a:rPr>
-              <a:t>难点：结构化字段设计与自动化清洗脚本开发</a:t>
+              <a:t>难点：高质量数据集构建核心技能的掌握与应用</a:t>
             </a:r>
             <a:endParaRPr lang="zh-CN" altLang="en-US" dirty="0" smtClean="0">
               <a:latin typeface="Arial" panose="020B0604020202020204" pitchFamily="34" charset="0"/>
